--- a/Topic_C/Exam_Practice/TC-L02_Writing_Workshop_Landscapes_Nature_Animals.pptx
+++ b/Topic_C/Exam_Practice/TC-L02_Writing_Workshop_Landscapes_Nature_Animals.pptx
@@ -784,7 +784,11 @@
           <a:lstStyle/>
           <a:p>
             <a:r>
-              <a:rPr lang="en-US" dirty="0"/>
+              <a:rPr lang="ar-SA" dirty="0">
+                <a:latin typeface="Amiri" pitchFamily="2" charset="-78"/>
+                <a:ea typeface="Amiri" pitchFamily="2" charset="-78"/>
+                <a:cs typeface="Amiri" pitchFamily="2" charset="-78"/>
+              </a:rPr>
               <a:t>Q3 (3 min to choose and read). Title (أ) suits Core and Develop; title (ب) suits Stretch.</a:t>
             </a:r>
             <a:endParaRPr lang="en-US" dirty="0"/>
@@ -1403,7 +1407,11 @@
           <a:lstStyle/>
           <a:p>
             <a:r>
-              <a:rPr lang="en-US" dirty="0"/>
+              <a:rPr lang="ar-SA" dirty="0">
+                <a:latin typeface="Amiri" pitchFamily="2" charset="-78"/>
+                <a:ea typeface="Amiri" pitchFamily="2" charset="-78"/>
+                <a:cs typeface="Amiri" pitchFamily="2" charset="-78"/>
+              </a:rPr>
               <a:t>WELCOME (1 min) — while students join.
 • Greet each student by name as they arrive: السَّلَامُ عَلَيْكُمْ. Take the register (Pastoral Tracker: attendance 0/1).
 • 2-MINUTE CHECK-IN (SEND training): a private chat to any student who seemed unsettled last lesson — “Are you okay today? 👍 / 👎”.
@@ -1936,7 +1944,11 @@
           <a:lstStyle/>
           <a:p>
             <a:r>
-              <a:rPr lang="en-US" dirty="0"/>
+              <a:rPr lang="ar-SA" dirty="0">
+                <a:latin typeface="Amiri" pitchFamily="2" charset="-78"/>
+                <a:ea typeface="Amiri" pitchFamily="2" charset="-78"/>
+                <a:cs typeface="Amiri" pitchFamily="2" charset="-78"/>
+              </a:rPr>
               <a:t>Question words: أَيْنَ (where) · كَيْفَ (what … like) · مَاذَا (what) · مَا رَأْيُكِ (your opinion) · لِمَاذَا (why) — bullet 2 is PAST, bullet 4 is FUTURE.</a:t>
             </a:r>
             <a:endParaRPr lang="en-US" dirty="0"/>
@@ -2508,6 +2520,7 @@
                   <a:srgbClr val="D4AF37"/>
                 </a:solidFill>
                 <a:latin typeface="Amiri" pitchFamily="2" charset="-78"/>
+                <a:ea typeface="Amiri" pitchFamily="2" charset="-78"/>
                 <a:cs typeface="Amiri" pitchFamily="2" charset="-78"/>
               </a:rPr>
               <a:t>م</a:t>
@@ -2714,6 +2727,7 @@
                   <a:srgbClr val="D4AF37"/>
                 </a:solidFill>
                 <a:latin typeface="Amiri" pitchFamily="2" charset="-78"/>
+                <a:ea typeface="Amiri" pitchFamily="2" charset="-78"/>
                 <a:cs typeface="Amiri" pitchFamily="2" charset="-78"/>
               </a:rPr>
               <a:t>وَرْشَةُ الكِتَابَةِ — الطَّبِيعَةُ وَالحَيَوَانَاتُ</a:t>
@@ -3171,6 +3185,7 @@
                   <a:srgbClr val="D4AF37"/>
                 </a:solidFill>
                 <a:latin typeface="Amiri" pitchFamily="2" charset="-78"/>
+                <a:ea typeface="Amiri" pitchFamily="2" charset="-78"/>
                 <a:cs typeface="Amiri" pitchFamily="2" charset="-78"/>
               </a:rPr>
               <a:t>م</a:t>
@@ -3491,6 +3506,7 @@
                   <a:srgbClr val="8A6D1E"/>
                 </a:solidFill>
                 <a:latin typeface="Amiri" pitchFamily="2" charset="-78"/>
+                <a:ea typeface="Amiri" pitchFamily="2" charset="-78"/>
                 <a:cs typeface="Amiri" pitchFamily="2" charset="-78"/>
               </a:rPr>
               <a:t>نَمُوذَجُ الإِجَابَةِ</a:t>
@@ -3604,6 +3620,7 @@
                   <a:srgbClr val="1F2A37"/>
                 </a:solidFill>
                 <a:latin typeface="Amiri" pitchFamily="2" charset="-78"/>
+                <a:ea typeface="Amiri" pitchFamily="2" charset="-78"/>
                 <a:cs typeface="Amiri" pitchFamily="2" charset="-78"/>
               </a:rPr>
               <a:t>مَرْحَبًا يَا زَيْنَبُ،</a:t>
@@ -3623,6 +3640,7 @@
                   <a:srgbClr val="1F2A37"/>
                 </a:solidFill>
                 <a:latin typeface="Amiri" pitchFamily="2" charset="-78"/>
+                <a:ea typeface="Amiri" pitchFamily="2" charset="-78"/>
                 <a:cs typeface="Amiri" pitchFamily="2" charset="-78"/>
               </a:rPr>
               <a:t>كَيْفَ حَالُكِ؟ أَنَا الآنَ فِي رِحْلَةٍ مَدْرَسِيَّةٍ فِي جِبَالِ وِيلْزَ. المَنْظَرُ هُنَا جَمِيلٌ جِدًّا: الجِبَالُ عَالِيَةٌ وَخَضْرَاءُ، وَالبُحَيْرَاتُ صَافِيَةٌ وَزَرْقَاءُ. أَمْسِ مَشَيْنَا ثَلَاثَ سَاعَاتٍ إِلَى قِمَّةِ جَبَلٍ، وَرَأَيْنَا طُيُورًا كَبِيرَةً وَخِرَافًا كَثِيرَةً. كَانَ الجَوُّ بَارِدًا، لٰكِنَّ الرِّحْلَةَ كَانَتْ مُمْتِعَةً. أُحِبُّ الطَّبِيعَةَ لِأَنَّهَا هَادِئَةٌ. غَدًا سَنَزُورُ شَلَّالًا كَبِيرًا فِي الغَابَةِ، وَسَآخُذُ صُوَرًا كَثِيرَةً.</a:t>
@@ -3642,6 +3660,7 @@
                   <a:srgbClr val="1F2A37"/>
                 </a:solidFill>
                 <a:latin typeface="Amiri" pitchFamily="2" charset="-78"/>
+                <a:ea typeface="Amiri" pitchFamily="2" charset="-78"/>
                 <a:cs typeface="Amiri" pitchFamily="2" charset="-78"/>
               </a:rPr>
               <a:t>مَعَ السَّلَامَةِ،</a:t>
@@ -3661,6 +3680,7 @@
                   <a:srgbClr val="1F2A37"/>
                 </a:solidFill>
                 <a:latin typeface="Amiri" pitchFamily="2" charset="-78"/>
+                <a:ea typeface="Amiri" pitchFamily="2" charset="-78"/>
                 <a:cs typeface="Amiri" pitchFamily="2" charset="-78"/>
               </a:rPr>
               <a:t>سَارَةُ</a:t>
@@ -3824,11 +3844,12 @@
               <a:buNone/>
             </a:pPr>
             <a:r>
-              <a:rPr lang="en-US" sz="950" b="1" dirty="0">
+              <a:rPr lang="ar-SA" sz="950" b="1" dirty="0">
                 <a:solidFill>
                   <a:srgbClr val="FFFFFF"/>
                 </a:solidFill>
                 <a:latin typeface="Calibri" pitchFamily="34" charset="0"/>
+                <a:ea typeface="Amiri" pitchFamily="2" charset="-78"/>
                 <a:cs typeface="Amiri" pitchFamily="2" charset="-78"/>
               </a:rPr>
               <a:t>الجِبَالُ عَالِيَةٌ وَخَضْرَاءُ</a:t>
@@ -3889,11 +3910,12 @@
               <a:buNone/>
             </a:pPr>
             <a:r>
-              <a:rPr lang="en-US" sz="950" b="1" dirty="0">
+              <a:rPr lang="ar-SA" sz="950" b="1" dirty="0">
                 <a:solidFill>
                   <a:srgbClr val="FFFFFF"/>
                 </a:solidFill>
                 <a:latin typeface="Calibri" pitchFamily="34" charset="0"/>
+                <a:ea typeface="Amiri" pitchFamily="2" charset="-78"/>
                 <a:cs typeface="Amiri" pitchFamily="2" charset="-78"/>
               </a:rPr>
               <a:t>وَرَأَيْنَا طُيُورًا كَبِيرَةً</a:t>
@@ -3954,11 +3976,12 @@
               <a:buNone/>
             </a:pPr>
             <a:r>
-              <a:rPr lang="en-US" sz="950" b="1" dirty="0">
+              <a:rPr lang="ar-SA" sz="950" b="1" dirty="0">
                 <a:solidFill>
                   <a:srgbClr val="FFFFFF"/>
                 </a:solidFill>
                 <a:latin typeface="Calibri" pitchFamily="34" charset="0"/>
+                <a:ea typeface="Amiri" pitchFamily="2" charset="-78"/>
                 <a:cs typeface="Amiri" pitchFamily="2" charset="-78"/>
               </a:rPr>
               <a:t>لِأَنَّهَا هَادِئَةٌ</a:t>
@@ -4019,11 +4042,12 @@
               <a:buNone/>
             </a:pPr>
             <a:r>
-              <a:rPr lang="en-US" sz="950" b="1" dirty="0">
+              <a:rPr lang="ar-SA" sz="950" b="1" dirty="0">
                 <a:solidFill>
                   <a:srgbClr val="FFFFFF"/>
                 </a:solidFill>
                 <a:latin typeface="Calibri" pitchFamily="34" charset="0"/>
+                <a:ea typeface="Amiri" pitchFamily="2" charset="-78"/>
                 <a:cs typeface="Amiri" pitchFamily="2" charset="-78"/>
               </a:rPr>
               <a:t>غَدًا سَنَزُورُ</a:t>
@@ -4157,6 +4181,7 @@
                   <a:srgbClr val="D4AF37"/>
                 </a:solidFill>
                 <a:latin typeface="Amiri" pitchFamily="2" charset="-78"/>
+                <a:ea typeface="Amiri" pitchFamily="2" charset="-78"/>
                 <a:cs typeface="Amiri" pitchFamily="2" charset="-78"/>
               </a:rPr>
               <a:t>م</a:t>
@@ -4477,6 +4502,7 @@
                   <a:srgbClr val="8A6D1E"/>
                 </a:solidFill>
                 <a:latin typeface="Amiri" pitchFamily="2" charset="-78"/>
+                <a:ea typeface="Amiri" pitchFamily="2" charset="-78"/>
                 <a:cs typeface="Amiri" pitchFamily="2" charset="-78"/>
               </a:rPr>
               <a:t>نَمُوذَجُ الإِجَابَةِ</a:t>
@@ -4590,6 +4616,7 @@
                   <a:srgbClr val="1F2A37"/>
                 </a:solidFill>
                 <a:latin typeface="Amiri" pitchFamily="2" charset="-78"/>
+                <a:ea typeface="Amiri" pitchFamily="2" charset="-78"/>
                 <a:cs typeface="Amiri" pitchFamily="2" charset="-78"/>
               </a:rPr>
               <a:t>عَزِيزَتِي زَيْنَبُ،</a:t>
@@ -4609,6 +4636,7 @@
                   <a:srgbClr val="1F2A37"/>
                 </a:solidFill>
                 <a:latin typeface="Amiri" pitchFamily="2" charset="-78"/>
+                <a:ea typeface="Amiri" pitchFamily="2" charset="-78"/>
                 <a:cs typeface="Amiri" pitchFamily="2" charset="-78"/>
               </a:rPr>
               <a:t>تَحِيَّةً طَيِّبَةً مِنْ جِبَالِ وِيلْزَ! أَقْضِي هٰذَا الأُسْبُوعَ فِي رِحْلَةٍ مَدْرَسِيَّةٍ فِي حَدِيقَةٍ وَطَنِيَّةٍ خَلَّابَةٍ؛ فَالجِبَالُ هُنَا عَالِيَةٌ تُغَطِّيهَا الغُيُومُ، وَالوِدْيَانُ خَضْرَاءُ تَجْرِي فِيهَا أَنْهَارٌ صَغِيرَةٌ صَافِيَةٌ. أَمْسِ صَعِدْنَا أَعْلَى قِمَّةٍ فِي المِنْطَقَةِ بَعْدَ مَشْيٍ اسْتَمَرَّ أَرْبَعَ سَاعَاتٍ، وَرَأَيْنَا صَقْرًا يَطِيرُ فَوْقَنَا، وَقَطِيعًا مِنَ الخِرَافِ البَيْضَاءِ تَرْعَى فِي الوَادِي. صَحِيحٌ أَنَّ المَطَرَ لَمْ يَتَوَقَّفْ، غَيْرَ أَنَّنِي لَمْ أَشْعُرْ بِهٰذَا الهُدُوءِ مِنْ قَبْلُ. غَدًا سَنَزُورُ شَلَّالًا مَشْهُورًا فِي وَسَطِ الغَابَةِ، وَإِذَا كَانَتِ الشَّمْسُ مُشْرِقَةً، فَسَأُرْسِلُ لَكِ صُوَرًا رَائِعَةً.</a:t>
@@ -4628,6 +4656,7 @@
                   <a:srgbClr val="1F2A37"/>
                 </a:solidFill>
                 <a:latin typeface="Amiri" pitchFamily="2" charset="-78"/>
+                <a:ea typeface="Amiri" pitchFamily="2" charset="-78"/>
                 <a:cs typeface="Amiri" pitchFamily="2" charset="-78"/>
               </a:rPr>
               <a:t>مَعَ مَحَبَّتِي،</a:t>
@@ -4647,6 +4676,7 @@
                   <a:srgbClr val="1F2A37"/>
                 </a:solidFill>
                 <a:latin typeface="Amiri" pitchFamily="2" charset="-78"/>
+                <a:ea typeface="Amiri" pitchFamily="2" charset="-78"/>
                 <a:cs typeface="Amiri" pitchFamily="2" charset="-78"/>
               </a:rPr>
               <a:t>سَارَةُ</a:t>
@@ -4810,11 +4840,12 @@
               <a:buNone/>
             </a:pPr>
             <a:r>
-              <a:rPr lang="en-US" sz="950" b="1" dirty="0">
+              <a:rPr lang="ar-SA" sz="950" b="1" dirty="0">
                 <a:solidFill>
                   <a:srgbClr val="FFFFFF"/>
                 </a:solidFill>
                 <a:latin typeface="Calibri" pitchFamily="34" charset="0"/>
+                <a:ea typeface="Amiri" pitchFamily="2" charset="-78"/>
                 <a:cs typeface="Amiri" pitchFamily="2" charset="-78"/>
               </a:rPr>
               <a:t>الجِبَالُ هُنَا عَالِيَةٌ تُغَطِّيهَا</a:t>
@@ -4875,11 +4906,12 @@
               <a:buNone/>
             </a:pPr>
             <a:r>
-              <a:rPr lang="en-US" sz="950" b="1" dirty="0">
+              <a:rPr lang="ar-SA" sz="950" b="1" dirty="0">
                 <a:solidFill>
                   <a:srgbClr val="FFFFFF"/>
                 </a:solidFill>
                 <a:latin typeface="Calibri" pitchFamily="34" charset="0"/>
+                <a:ea typeface="Amiri" pitchFamily="2" charset="-78"/>
                 <a:cs typeface="Amiri" pitchFamily="2" charset="-78"/>
               </a:rPr>
               <a:t>رَأَيْنَا صَقْرًا يَطِيرُ</a:t>
@@ -4940,11 +4972,12 @@
               <a:buNone/>
             </a:pPr>
             <a:r>
-              <a:rPr lang="en-US" sz="950" b="1" dirty="0">
+              <a:rPr lang="ar-SA" sz="950" b="1" dirty="0">
                 <a:solidFill>
                   <a:srgbClr val="FFFFFF"/>
                 </a:solidFill>
                 <a:latin typeface="Calibri" pitchFamily="34" charset="0"/>
+                <a:ea typeface="Amiri" pitchFamily="2" charset="-78"/>
                 <a:cs typeface="Amiri" pitchFamily="2" charset="-78"/>
               </a:rPr>
               <a:t>لَمْ أَشْعُرْ … مِنْ قَبْلُ</a:t>
@@ -5005,11 +5038,12 @@
               <a:buNone/>
             </a:pPr>
             <a:r>
-              <a:rPr lang="en-US" sz="950" b="1" dirty="0">
+              <a:rPr lang="ar-SA" sz="950" b="1" dirty="0">
                 <a:solidFill>
                   <a:srgbClr val="FFFFFF"/>
                 </a:solidFill>
                 <a:latin typeface="Calibri" pitchFamily="34" charset="0"/>
+                <a:ea typeface="Amiri" pitchFamily="2" charset="-78"/>
                 <a:cs typeface="Amiri" pitchFamily="2" charset="-78"/>
               </a:rPr>
               <a:t>إِذَا كَانَتِ … فَسَأُرْسِلُ</a:t>
@@ -5143,6 +5177,7 @@
                   <a:srgbClr val="D4AF37"/>
                 </a:solidFill>
                 <a:latin typeface="Amiri" pitchFamily="2" charset="-78"/>
+                <a:ea typeface="Amiri" pitchFamily="2" charset="-78"/>
                 <a:cs typeface="Amiri" pitchFamily="2" charset="-78"/>
               </a:rPr>
               <a:t>م</a:t>
@@ -5463,6 +5498,7 @@
                   <a:srgbClr val="8A6D1E"/>
                 </a:solidFill>
                 <a:latin typeface="Amiri" pitchFamily="2" charset="-78"/>
+                <a:ea typeface="Amiri" pitchFamily="2" charset="-78"/>
                 <a:cs typeface="Amiri" pitchFamily="2" charset="-78"/>
               </a:rPr>
               <a:t>اخْتَرْ عُنْوَانًا وَاحِدًا</a:t>
@@ -5743,6 +5779,7 @@
                   <a:srgbClr val="1B3B6F"/>
                 </a:solidFill>
                 <a:latin typeface="Amiri" pitchFamily="2" charset="-78"/>
+                <a:ea typeface="Amiri" pitchFamily="2" charset="-78"/>
                 <a:cs typeface="Amiri" pitchFamily="2" charset="-78"/>
               </a:rPr>
               <a:t>مَكَانٌ طَبِيعِيٌّ لَا أَنْسَاهُ</a:t>
@@ -5781,6 +5818,7 @@
                   <a:srgbClr val="1B3B6F"/>
                 </a:solidFill>
                 <a:latin typeface="Amiri" pitchFamily="2" charset="-78"/>
+                <a:ea typeface="Amiri" pitchFamily="2" charset="-78"/>
                 <a:cs typeface="Amiri" pitchFamily="2" charset="-78"/>
               </a:rPr>
               <a:t>(أ)</a:t>
@@ -5887,6 +5925,7 @@
                   <a:srgbClr val="1B3B6F"/>
                 </a:solidFill>
                 <a:latin typeface="Amiri" pitchFamily="2" charset="-78"/>
+                <a:ea typeface="Amiri" pitchFamily="2" charset="-78"/>
                 <a:cs typeface="Amiri" pitchFamily="2" charset="-78"/>
               </a:rPr>
               <a:t>الطَّبِيعَةُ حَوْلَ مَدِينَتِكَ · مَكَانُكَ المُفَضَّلُ وَوَصْفُهُ · رِحْلَةٌ إِلَى مَكَانٍ طَبِيعِيٍّ · رَأْيُكَ وَأَحْلَامُكَ</a:t>
@@ -6018,6 +6057,7 @@
                   <a:srgbClr val="1B3B6F"/>
                 </a:solidFill>
                 <a:latin typeface="Amiri" pitchFamily="2" charset="-78"/>
+                <a:ea typeface="Amiri" pitchFamily="2" charset="-78"/>
                 <a:cs typeface="Amiri" pitchFamily="2" charset="-78"/>
               </a:rPr>
               <a:t>الحَيَوَانَاتُ المُهَدَّدَةُ: مَسْؤُولِيَّتُنَا</a:t>
@@ -6056,6 +6096,7 @@
                   <a:srgbClr val="1B3B6F"/>
                 </a:solidFill>
                 <a:latin typeface="Amiri" pitchFamily="2" charset="-78"/>
+                <a:ea typeface="Amiri" pitchFamily="2" charset="-78"/>
                 <a:cs typeface="Amiri" pitchFamily="2" charset="-78"/>
               </a:rPr>
               <a:t>(ب)</a:t>
@@ -6162,6 +6203,7 @@
                   <a:srgbClr val="1B3B6F"/>
                 </a:solidFill>
                 <a:latin typeface="Amiri" pitchFamily="2" charset="-78"/>
+                <a:ea typeface="Amiri" pitchFamily="2" charset="-78"/>
                 <a:cs typeface="Amiri" pitchFamily="2" charset="-78"/>
               </a:rPr>
               <a:t>لِمَاذَا تَخْتَفِي الحَيَوَانَاتُ؟ · المَاضِي وَالحَاضِرُ · مُبَادَرَةٌ شَارَكْتَ فِيهَا · رَأْيُكَ وَاقْتِرَاحُكَ</a:t>
@@ -6361,6 +6403,7 @@
                   <a:srgbClr val="D4AF37"/>
                 </a:solidFill>
                 <a:latin typeface="Amiri" pitchFamily="2" charset="-78"/>
+                <a:ea typeface="Amiri" pitchFamily="2" charset="-78"/>
                 <a:cs typeface="Amiri" pitchFamily="2" charset="-78"/>
               </a:rPr>
               <a:t>م</a:t>
@@ -6681,6 +6724,7 @@
                   <a:srgbClr val="8A6D1E"/>
                 </a:solidFill>
                 <a:latin typeface="Amiri" pitchFamily="2" charset="-78"/>
+                <a:ea typeface="Amiri" pitchFamily="2" charset="-78"/>
                 <a:cs typeface="Amiri" pitchFamily="2" charset="-78"/>
               </a:rPr>
               <a:t>خُطَّةُ الكِتَابَةِ</a:t>
@@ -7305,6 +7349,7 @@
                   <a:srgbClr val="1B3B6F"/>
                 </a:solidFill>
                 <a:latin typeface="Amiri" pitchFamily="2" charset="-78"/>
+                <a:ea typeface="Amiri" pitchFamily="2" charset="-78"/>
                 <a:cs typeface="Amiri" pitchFamily="2" charset="-78"/>
               </a:rPr>
               <a:t>تَعِيشُ فِي البَحْرِ أَسْمَاكٌ كَثِيرَةٌ.</a:t>
@@ -7404,6 +7449,7 @@
                   <a:srgbClr val="1B3B6F"/>
                 </a:solidFill>
                 <a:latin typeface="Amiri" pitchFamily="2" charset="-78"/>
+                <a:ea typeface="Amiri" pitchFamily="2" charset="-78"/>
                 <a:cs typeface="Amiri" pitchFamily="2" charset="-78"/>
               </a:rPr>
               <a:t>كَانَتِ الرِّمَالُ حَمْرَاءَ، وَالجِبَالُ عَالِيَةً.</a:t>
@@ -7503,6 +7549,7 @@
                   <a:srgbClr val="1B3B6F"/>
                 </a:solidFill>
                 <a:latin typeface="Amiri" pitchFamily="2" charset="-78"/>
+                <a:ea typeface="Amiri" pitchFamily="2" charset="-78"/>
                 <a:cs typeface="Amiri" pitchFamily="2" charset="-78"/>
               </a:rPr>
               <a:t>سَأَزُورُ غَابَاتِ إِفْرِيقْيَا.</a:t>
@@ -7664,6 +7711,7 @@
                   <a:srgbClr val="1F2A37"/>
                 </a:solidFill>
                 <a:latin typeface="Amiri" pitchFamily="2" charset="-78"/>
+                <a:ea typeface="Amiri" pitchFamily="2" charset="-78"/>
                 <a:cs typeface="Amiri" pitchFamily="2" charset="-78"/>
               </a:rPr>
               <a:t>أ</a:t>
@@ -7690,6 +7738,7 @@
                   <a:srgbClr val="1F2A37"/>
                 </a:solidFill>
                 <a:latin typeface="Amiri" pitchFamily="2" charset="-78"/>
+                <a:ea typeface="Amiri" pitchFamily="2" charset="-78"/>
                 <a:cs typeface="Amiri" pitchFamily="2" charset="-78"/>
               </a:rPr>
               <a:t>ب</a:t>
@@ -7836,6 +7885,7 @@
                   <a:srgbClr val="D4AF37"/>
                 </a:solidFill>
                 <a:latin typeface="Amiri" pitchFamily="2" charset="-78"/>
+                <a:ea typeface="Amiri" pitchFamily="2" charset="-78"/>
                 <a:cs typeface="Amiri" pitchFamily="2" charset="-78"/>
               </a:rPr>
               <a:t>م</a:t>
@@ -8093,6 +8143,7 @@
                   <a:srgbClr val="8A6D1E"/>
                 </a:solidFill>
                 <a:latin typeface="Amiri" pitchFamily="2" charset="-78"/>
+                <a:ea typeface="Amiri" pitchFamily="2" charset="-78"/>
                 <a:cs typeface="Amiri" pitchFamily="2" charset="-78"/>
               </a:rPr>
               <a:t>أ</a:t>
@@ -8157,6 +8208,7 @@
                   <a:srgbClr val="1B3B6F"/>
                 </a:solidFill>
                 <a:latin typeface="Amiri" pitchFamily="2" charset="-78"/>
+                <a:ea typeface="Amiri" pitchFamily="2" charset="-78"/>
                 <a:cs typeface="Amiri" pitchFamily="2" charset="-78"/>
               </a:rPr>
               <a:t>أ</a:t>
@@ -8208,6 +8260,7 @@
                   <a:srgbClr val="8A6D1E"/>
                 </a:solidFill>
                 <a:latin typeface="Amiri" pitchFamily="2" charset="-78"/>
+                <a:ea typeface="Amiri" pitchFamily="2" charset="-78"/>
                 <a:cs typeface="Amiri" pitchFamily="2" charset="-78"/>
               </a:rPr>
               <a:t>نَمُوذَجُ الإِجَابَةِ</a:t>
@@ -8321,6 +8374,7 @@
                   <a:srgbClr val="1F2A37"/>
                 </a:solidFill>
                 <a:latin typeface="Amiri" pitchFamily="2" charset="-78"/>
+                <a:ea typeface="Amiri" pitchFamily="2" charset="-78"/>
                 <a:cs typeface="Amiri" pitchFamily="2" charset="-78"/>
               </a:rPr>
               <a:t>أُحِبُّ الطَّبِيعَةَ كَثِيرًا. أَسْكُنُ فِي مَدِينَةٍ كَبِيرَةٍ، لٰكِنْ قُرْبَ مَدِينَتِي تُوجَدُ تِلَالٌ خَضْرَاءُ وَنَهْرٌ طَوِيلٌ. فِي نِهَايَةِ الأُسْبُوعِ أَمْشِي مَعَ أَبِي فِي التِّلَالِ، وَنَرَى الطُّيُورَ وَالأَرَانِبَ. أَحْيَانًا نَجْلِسُ قُرْبَ النَّهْرِ، وَنَأْكُلُ السَّنْدَوِيشَاتِ، وَنَسْمَعُ أَصْوَاتَ الطُّيُورِ.</a:t>
@@ -8340,6 +8394,7 @@
                   <a:srgbClr val="1F2A37"/>
                 </a:solidFill>
                 <a:latin typeface="Amiri" pitchFamily="2" charset="-78"/>
+                <a:ea typeface="Amiri" pitchFamily="2" charset="-78"/>
                 <a:cs typeface="Amiri" pitchFamily="2" charset="-78"/>
               </a:rPr>
               <a:t>مَكَانِيَ المُفَضَّلُ هُوَ الشَّاطِئُ. الرَّمْلُ هُنَاكَ أَصْفَرُ وَنَاعِمٌ، وَالبَحْرُ أَزْرَقُ. تَعِيشُ فِي البَحْرِ أَسْمَاكٌ كَثِيرَةٌ، وَتَطِيرُ فَوْقَهُ طُيُورٌ بَيْضَاءُ. أُحِبُّ الشَّاطِئَ لِأَنَّهُ هَادِئٌ وَجَمِيلٌ.</a:t>
@@ -8359,6 +8414,7 @@
                   <a:srgbClr val="1F2A37"/>
                 </a:solidFill>
                 <a:latin typeface="Amiri" pitchFamily="2" charset="-78"/>
+                <a:ea typeface="Amiri" pitchFamily="2" charset="-78"/>
                 <a:cs typeface="Amiri" pitchFamily="2" charset="-78"/>
               </a:rPr>
               <a:t>فِي الصَّيْفِ المَاضِي زُرْتُ الأُرْدُنَّ مَعَ أُسْرَتِي. ذَهَبْنَا إِلَى صَحْرَاءِ وَادِي رَمٍّ. كَانَتِ الرِّمَالُ حَمْرَاءَ، وَالجِبَالُ عَالِيَةً. رَكِبْنَا الجِمَالَ، وَنِمْنَا فِي خَيْمَةٍ، وَرَأَيْنَا نُجُومًا كَثِيرَةً جِدًّا. كَانَتْ تِلْكَ أَجْمَلَ لَيْلَةٍ فِي حَيَاتِي، وَلَنْ أَنْسَاهَا أَبَدًا.</a:t>
@@ -8378,6 +8434,7 @@
                   <a:srgbClr val="1F2A37"/>
                 </a:solidFill>
                 <a:latin typeface="Amiri" pitchFamily="2" charset="-78"/>
+                <a:ea typeface="Amiri" pitchFamily="2" charset="-78"/>
                 <a:cs typeface="Amiri" pitchFamily="2" charset="-78"/>
               </a:rPr>
               <a:t>فِي رَأْيِي، يَجِبُ أَنْ نَحْمِيَ الطَّبِيعَةَ وَالحَيَوَانَاتِ. فِي المُسْتَقْبَلِ أُرِيدُ أَنْ أَعْمَلَ فِي حَدِيقَةٍ وَطَنِيَّةٍ، وَسَأَزُورُ غَابَاتِ إِفْرِيقْيَا.</a:t>
@@ -8541,11 +8598,12 @@
               <a:buNone/>
             </a:pPr>
             <a:r>
-              <a:rPr lang="en-US" sz="950" b="1" dirty="0">
+              <a:rPr lang="ar-SA" sz="950" b="1" dirty="0">
                 <a:solidFill>
                   <a:srgbClr val="FFFFFF"/>
                 </a:solidFill>
                 <a:latin typeface="Calibri" pitchFamily="34" charset="0"/>
+                <a:ea typeface="Amiri" pitchFamily="2" charset="-78"/>
                 <a:cs typeface="Amiri" pitchFamily="2" charset="-78"/>
               </a:rPr>
               <a:t>تِلَالٌ خَضْرَاءُ</a:t>
@@ -8606,11 +8664,12 @@
               <a:buNone/>
             </a:pPr>
             <a:r>
-              <a:rPr lang="en-US" sz="950" b="1" dirty="0">
+              <a:rPr lang="ar-SA" sz="950" b="1" dirty="0">
                 <a:solidFill>
                   <a:srgbClr val="FFFFFF"/>
                 </a:solidFill>
                 <a:latin typeface="Calibri" pitchFamily="34" charset="0"/>
+                <a:ea typeface="Amiri" pitchFamily="2" charset="-78"/>
                 <a:cs typeface="Amiri" pitchFamily="2" charset="-78"/>
               </a:rPr>
               <a:t>طُيُورٌ بَيْضَاءُ</a:t>
@@ -8671,11 +8730,12 @@
               <a:buNone/>
             </a:pPr>
             <a:r>
-              <a:rPr lang="en-US" sz="950" b="1" dirty="0">
+              <a:rPr lang="ar-SA" sz="950" b="1" dirty="0">
                 <a:solidFill>
                   <a:srgbClr val="FFFFFF"/>
                 </a:solidFill>
                 <a:latin typeface="Calibri" pitchFamily="34" charset="0"/>
+                <a:ea typeface="Amiri" pitchFamily="2" charset="-78"/>
                 <a:cs typeface="Amiri" pitchFamily="2" charset="-78"/>
               </a:rPr>
               <a:t>كَانَتِ الرِّمَالُ حَمْرَاءَ</a:t>
@@ -8736,11 +8796,12 @@
               <a:buNone/>
             </a:pPr>
             <a:r>
-              <a:rPr lang="en-US" sz="950" b="1" dirty="0">
+              <a:rPr lang="ar-SA" sz="950" b="1" dirty="0">
                 <a:solidFill>
                   <a:srgbClr val="FFFFFF"/>
                 </a:solidFill>
                 <a:latin typeface="Calibri" pitchFamily="34" charset="0"/>
+                <a:ea typeface="Amiri" pitchFamily="2" charset="-78"/>
                 <a:cs typeface="Amiri" pitchFamily="2" charset="-78"/>
               </a:rPr>
               <a:t>يَجِبُ أَنْ نَحْمِيَ</a:t>
@@ -8874,6 +8935,7 @@
                   <a:srgbClr val="D4AF37"/>
                 </a:solidFill>
                 <a:latin typeface="Amiri" pitchFamily="2" charset="-78"/>
+                <a:ea typeface="Amiri" pitchFamily="2" charset="-78"/>
                 <a:cs typeface="Amiri" pitchFamily="2" charset="-78"/>
               </a:rPr>
               <a:t>م</a:t>
@@ -9131,6 +9193,7 @@
                   <a:srgbClr val="8A6D1E"/>
                 </a:solidFill>
                 <a:latin typeface="Amiri" pitchFamily="2" charset="-78"/>
+                <a:ea typeface="Amiri" pitchFamily="2" charset="-78"/>
                 <a:cs typeface="Amiri" pitchFamily="2" charset="-78"/>
               </a:rPr>
               <a:t>أ</a:t>
@@ -9195,6 +9258,7 @@
                   <a:srgbClr val="1B3B6F"/>
                 </a:solidFill>
                 <a:latin typeface="Amiri" pitchFamily="2" charset="-78"/>
+                <a:ea typeface="Amiri" pitchFamily="2" charset="-78"/>
                 <a:cs typeface="Amiri" pitchFamily="2" charset="-78"/>
               </a:rPr>
               <a:t>أ</a:t>
@@ -9246,6 +9310,7 @@
                   <a:srgbClr val="8A6D1E"/>
                 </a:solidFill>
                 <a:latin typeface="Amiri" pitchFamily="2" charset="-78"/>
+                <a:ea typeface="Amiri" pitchFamily="2" charset="-78"/>
                 <a:cs typeface="Amiri" pitchFamily="2" charset="-78"/>
               </a:rPr>
               <a:t>نَمُوذَجُ الإِجَابَةِ</a:t>
@@ -9359,6 +9424,7 @@
                   <a:srgbClr val="1F2A37"/>
                 </a:solidFill>
                 <a:latin typeface="Amiri" pitchFamily="2" charset="-78"/>
+                <a:ea typeface="Amiri" pitchFamily="2" charset="-78"/>
                 <a:cs typeface="Amiri" pitchFamily="2" charset="-78"/>
               </a:rPr>
               <a:t>هُنَاكَ أَمَاكِنُ تُغَيِّرُ نَظْرَتَنَا إِلَى العَالَمِ، وَأَهَمُّهَا عِنْدِي صَحْرَاءُ وَادِي رَمٍّ فِي جَنُوبِ الأُرْدُنِّ. قَبْلَ أَنْ أَزُورَهَا، كُنْتُ أَظُنُّ أَنَّ الصَّحْرَاءَ مَكَانٌ فَارِغٌ مُمِلٌّ، لَا حَيَاةَ فِيهِ إِلَّا الرَّمْلُ وَالشَّمْسُ الحَارِقَةُ وَالرِّيَاحُ.</a:t>
@@ -9378,6 +9444,7 @@
                   <a:srgbClr val="1F2A37"/>
                 </a:solidFill>
                 <a:latin typeface="Amiri" pitchFamily="2" charset="-78"/>
+                <a:ea typeface="Amiri" pitchFamily="2" charset="-78"/>
                 <a:cs typeface="Amiri" pitchFamily="2" charset="-78"/>
               </a:rPr>
               <a:t>لٰكِنَّ مَا رَأَيْتُهُ كَانَ مُخْتَلِفًا تَمَامًا؛ فَالرِّمَالُ حَمْرَاءُ كَالنَّارِ، وَالجِبَالُ الصَّخْرِيَّةُ تَرْتَفِعُ فَجْأَةً كَأَنَّهَا قِلَاعٌ قَدِيمَةٌ. أَمَّا فِي اللَّيْلِ، فَتَمْتَلِئُ السَّمَاءُ بِآلَافِ النُّجُومِ الَّتِي لَا نَرَاهَا أَبَدًا فِي المُدُنِ.</a:t>
@@ -9397,6 +9464,7 @@
                   <a:srgbClr val="1F2A37"/>
                 </a:solidFill>
                 <a:latin typeface="Amiri" pitchFamily="2" charset="-78"/>
+                <a:ea typeface="Amiri" pitchFamily="2" charset="-78"/>
                 <a:cs typeface="Amiri" pitchFamily="2" charset="-78"/>
               </a:rPr>
               <a:t>وَأَكْثَرُ مَا أَدْهَشَنِي الحَيَوَانَاتُ الَّتِي تَعِيشُ هُنَاكَ؛ فَقَدْ رَأَيْتُ مَعَ المُرْشِدِ آثَارَ ثَعْلَبٍ صَحْرَاوِيٍّ صَغِيرٍ، وَشَرَحَ لَنَا كَيْفَ يَخْتَبِئُ تَحْتَ الرَّمْلِ فِي النَّهَارِ، وَيَخْرُجُ لِيَبْحَثَ عَنْ طَعَامِهِ فِي اللَّيْلِ البَارِدِ. وَرَأَيْنَا أَيْضًا نَبَاتَاتٍ صَغِيرَةً تَعِيشُ بِقَلِيلٍ مِنَ المَاءِ، وَطُيُورًا تَبْنِي أَعْشَاشَهَا بَيْنَ الصُّخُورِ العَالِيَةِ.</a:t>
@@ -9416,6 +9484,7 @@
                   <a:srgbClr val="1F2A37"/>
                 </a:solidFill>
                 <a:latin typeface="Amiri" pitchFamily="2" charset="-78"/>
+                <a:ea typeface="Amiri" pitchFamily="2" charset="-78"/>
                 <a:cs typeface="Amiri" pitchFamily="2" charset="-78"/>
               </a:rPr>
               <a:t>صَحِيحٌ أَنَّ الجَوَّ كَانَ قَاسِيًا، غَيْرَ أَنَّ الرِّحْلَةَ عَلَّمَتْنِي أَنَّ لِكُلِّ نِظَامٍ بِيئِيٍّ جَمَالَهُ وَأَسْرَارَهُ. وَلَوْ عُدْتُ إِلَى هُنَاكَ، لَبَقِيتُ أُسْبُوعًا كَامِلًا، وَلَدَرَسْتُ الحَيَوَانَاتِ الصَّحْرَاوِيَّةَ بِنَفْسِي.</a:t>
@@ -9514,11 +9583,12 @@
               <a:buNone/>
             </a:pPr>
             <a:r>
-              <a:rPr lang="en-US" sz="950" b="1" dirty="0">
+              <a:rPr lang="ar-SA" sz="950" b="1" dirty="0">
                 <a:solidFill>
                   <a:srgbClr val="FFFFFF"/>
                 </a:solidFill>
                 <a:latin typeface="Calibri" pitchFamily="34" charset="0"/>
+                <a:ea typeface="Amiri" pitchFamily="2" charset="-78"/>
                 <a:cs typeface="Amiri" pitchFamily="2" charset="-78"/>
               </a:rPr>
               <a:t>كُنْتُ أَظُنُّ أَنَّ</a:t>
@@ -9579,11 +9649,12 @@
               <a:buNone/>
             </a:pPr>
             <a:r>
-              <a:rPr lang="en-US" sz="950" b="1" dirty="0">
+              <a:rPr lang="ar-SA" sz="950" b="1" dirty="0">
                 <a:solidFill>
                   <a:srgbClr val="FFFFFF"/>
                 </a:solidFill>
                 <a:latin typeface="Calibri" pitchFamily="34" charset="0"/>
+                <a:ea typeface="Amiri" pitchFamily="2" charset="-78"/>
                 <a:cs typeface="Amiri" pitchFamily="2" charset="-78"/>
               </a:rPr>
               <a:t>كَأَنَّهَا قِلَاعٌ</a:t>
@@ -9644,11 +9715,12 @@
               <a:buNone/>
             </a:pPr>
             <a:r>
-              <a:rPr lang="en-US" sz="950" b="1" dirty="0">
+              <a:rPr lang="ar-SA" sz="950" b="1" dirty="0">
                 <a:solidFill>
                   <a:srgbClr val="FFFFFF"/>
                 </a:solidFill>
                 <a:latin typeface="Calibri" pitchFamily="34" charset="0"/>
+                <a:ea typeface="Amiri" pitchFamily="2" charset="-78"/>
                 <a:cs typeface="Amiri" pitchFamily="2" charset="-78"/>
               </a:rPr>
               <a:t>أَمَّا فِي اللَّيْلِ، فَتَمْتَلِئُ</a:t>
@@ -9709,11 +9781,12 @@
               <a:buNone/>
             </a:pPr>
             <a:r>
-              <a:rPr lang="en-US" sz="950" b="1" dirty="0">
+              <a:rPr lang="ar-SA" sz="950" b="1" dirty="0">
                 <a:solidFill>
                   <a:srgbClr val="FFFFFF"/>
                 </a:solidFill>
                 <a:latin typeface="Calibri" pitchFamily="34" charset="0"/>
+                <a:ea typeface="Amiri" pitchFamily="2" charset="-78"/>
                 <a:cs typeface="Amiri" pitchFamily="2" charset="-78"/>
               </a:rPr>
               <a:t>لَوْ عُدْتُ … لَبَقِيتُ</a:t>
@@ -9847,6 +9920,7 @@
                   <a:srgbClr val="D4AF37"/>
                 </a:solidFill>
                 <a:latin typeface="Amiri" pitchFamily="2" charset="-78"/>
+                <a:ea typeface="Amiri" pitchFamily="2" charset="-78"/>
                 <a:cs typeface="Amiri" pitchFamily="2" charset="-78"/>
               </a:rPr>
               <a:t>م</a:t>
@@ -10104,6 +10178,7 @@
                   <a:srgbClr val="8A6D1E"/>
                 </a:solidFill>
                 <a:latin typeface="Amiri" pitchFamily="2" charset="-78"/>
+                <a:ea typeface="Amiri" pitchFamily="2" charset="-78"/>
                 <a:cs typeface="Amiri" pitchFamily="2" charset="-78"/>
               </a:rPr>
               <a:t>ب</a:t>
@@ -10168,6 +10243,7 @@
                   <a:srgbClr val="1B3B6F"/>
                 </a:solidFill>
                 <a:latin typeface="Amiri" pitchFamily="2" charset="-78"/>
+                <a:ea typeface="Amiri" pitchFamily="2" charset="-78"/>
                 <a:cs typeface="Amiri" pitchFamily="2" charset="-78"/>
               </a:rPr>
               <a:t>ب</a:t>
@@ -10219,6 +10295,7 @@
                   <a:srgbClr val="8A6D1E"/>
                 </a:solidFill>
                 <a:latin typeface="Amiri" pitchFamily="2" charset="-78"/>
+                <a:ea typeface="Amiri" pitchFamily="2" charset="-78"/>
                 <a:cs typeface="Amiri" pitchFamily="2" charset="-78"/>
               </a:rPr>
               <a:t>نَمُوذَجُ الإِجَابَةِ</a:t>
@@ -10332,6 +10409,7 @@
                   <a:srgbClr val="1F2A37"/>
                 </a:solidFill>
                 <a:latin typeface="Amiri" pitchFamily="2" charset="-78"/>
+                <a:ea typeface="Amiri" pitchFamily="2" charset="-78"/>
                 <a:cs typeface="Amiri" pitchFamily="2" charset="-78"/>
               </a:rPr>
               <a:t>تَخْتَفِي كُلَّ سَنَةٍ آلَافُ الأَنْوَاعِ مِنَ الحَيَوَانَاتِ وَالنَّبَاتَاتِ، وَيُحَذِّرُ العُلَمَاءُ مِنْ أَنَّ النَّمِرَ العَرَبِيَّ وَالسُّلَحْفَاةَ البَحْرِيَّةَ وَكَثِيرًا مِنَ الطُّيُورِ قَدْ تَخْتَفِي قَرِيبًا إِذَا لَمْ نَتَحَرَّكْ.</a:t>
@@ -10351,6 +10429,7 @@
                   <a:srgbClr val="1F2A37"/>
                 </a:solidFill>
                 <a:latin typeface="Amiri" pitchFamily="2" charset="-78"/>
+                <a:ea typeface="Amiri" pitchFamily="2" charset="-78"/>
                 <a:cs typeface="Amiri" pitchFamily="2" charset="-78"/>
               </a:rPr>
               <a:t>فِي المَاضِي كَانَتِ الغَابَاتُ الكَثِيفَةُ تُغَطِّي مِسَاحَاتٍ شَاسِعَةً، وَكَانَتِ الحَيَوَانَاتُ تَعِيشُ بِأَمَانٍ بَعِيدًا عَنِ الإِنْسَانِ، أَمَّا اليَوْمَ فَتَتَحَوَّلُ الغَابَاتُ إِلَى مَزَارِعَ وَمُدُنٍ، مِمَّا يَطْرُدُ الحَيَوَانَاتِ مِنْ بُيُوتِهَا الطَّبِيعِيَّةِ، وَيُلَوِّثُ الأَنْهَارَ الَّتِي تَشْرَبُ مِنْهَا.</a:t>
@@ -10370,6 +10449,7 @@
                   <a:srgbClr val="1F2A37"/>
                 </a:solidFill>
                 <a:latin typeface="Amiri" pitchFamily="2" charset="-78"/>
+                <a:ea typeface="Amiri" pitchFamily="2" charset="-78"/>
                 <a:cs typeface="Amiri" pitchFamily="2" charset="-78"/>
               </a:rPr>
               <a:t>لَكِنَّ الأَمَلَ مَوْجُودٌ؛ فَفِي السَّنَةِ المَاضِيَةِ شَارَكْتُ مَعَ نَادِي البِيئَةِ فِي مَدْرَسَتِي فِي زِرَاعَةِ مِئَتَيْ شَجَرَةٍ قُرْبَ النَّهْرِ، وَصَنَعْنَا بُيُوتًا خَشَبِيَّةً لِلطُّيُورِ. وَبَعْدَ أَشْهُرٍ قَلِيلَةٍ، لَاحَظْنَا عَوْدَةَ أَنْوَاعٍ مِنَ الطُّيُورِ لَمْ نَرَهَا مُنْذُ سَنَوَاتٍ، وَشَعَرْنَا بِأَنَّ عَمَلَنَا الصَّغِيرَ قَدْ صَنَعَ فَرْقًا حَقِيقِيًّا فِي حَيِّنَا.</a:t>
@@ -10389,6 +10469,7 @@
                   <a:srgbClr val="1F2A37"/>
                 </a:solidFill>
                 <a:latin typeface="Amiri" pitchFamily="2" charset="-78"/>
+                <a:ea typeface="Amiri" pitchFamily="2" charset="-78"/>
                 <a:cs typeface="Amiri" pitchFamily="2" charset="-78"/>
               </a:rPr>
               <a:t>صَحِيحٌ أَنَّ النَّاسَ يَحْتَاجُونَ إِلَى الأَرْضِ لِلسَّكَنِ وَالزِّرَاعَةِ، غَيْرَ أَنَّنَا جُزْءٌ مِنَ الطَّبِيعَةِ لَا أَسْيَادُهَا. وَلَوْ خَصَّصَتْ كُلُّ مَدِينَةٍ جُزْءًا مِنْ أَرْضِهَا لِلْحَيَاةِ البَرِّيَّةِ، لَعَاشَ الإِنْسَانُ وَالحَيَوَانُ جَنْبًا إِلَى جَنْبٍ.</a:t>
@@ -10487,11 +10568,12 @@
               <a:buNone/>
             </a:pPr>
             <a:r>
-              <a:rPr lang="en-US" sz="950" b="1" dirty="0">
+              <a:rPr lang="ar-SA" sz="950" b="1" dirty="0">
                 <a:solidFill>
                   <a:srgbClr val="FFFFFF"/>
                 </a:solidFill>
                 <a:latin typeface="Calibri" pitchFamily="34" charset="0"/>
+                <a:ea typeface="Amiri" pitchFamily="2" charset="-78"/>
                 <a:cs typeface="Amiri" pitchFamily="2" charset="-78"/>
               </a:rPr>
               <a:t>إِذَا لَمْ نَتَحَرَّكْ</a:t>
@@ -10552,11 +10634,12 @@
               <a:buNone/>
             </a:pPr>
             <a:r>
-              <a:rPr lang="en-US" sz="950" b="1" dirty="0">
+              <a:rPr lang="ar-SA" sz="950" b="1" dirty="0">
                 <a:solidFill>
                   <a:srgbClr val="FFFFFF"/>
                 </a:solidFill>
                 <a:latin typeface="Calibri" pitchFamily="34" charset="0"/>
+                <a:ea typeface="Amiri" pitchFamily="2" charset="-78"/>
                 <a:cs typeface="Amiri" pitchFamily="2" charset="-78"/>
               </a:rPr>
               <a:t>أَمَّا اليَوْمَ فَتَتَحَوَّلُ</a:t>
@@ -10617,11 +10700,12 @@
               <a:buNone/>
             </a:pPr>
             <a:r>
-              <a:rPr lang="en-US" sz="950" b="1" dirty="0">
+              <a:rPr lang="ar-SA" sz="950" b="1" dirty="0">
                 <a:solidFill>
                   <a:srgbClr val="FFFFFF"/>
                 </a:solidFill>
                 <a:latin typeface="Calibri" pitchFamily="34" charset="0"/>
+                <a:ea typeface="Amiri" pitchFamily="2" charset="-78"/>
                 <a:cs typeface="Amiri" pitchFamily="2" charset="-78"/>
               </a:rPr>
               <a:t>لَمْ نَرَهَا مُنْذُ</a:t>
@@ -10682,11 +10766,12 @@
               <a:buNone/>
             </a:pPr>
             <a:r>
-              <a:rPr lang="en-US" sz="950" b="1" dirty="0">
+              <a:rPr lang="ar-SA" sz="950" b="1" dirty="0">
                 <a:solidFill>
                   <a:srgbClr val="FFFFFF"/>
                 </a:solidFill>
                 <a:latin typeface="Calibri" pitchFamily="34" charset="0"/>
+                <a:ea typeface="Amiri" pitchFamily="2" charset="-78"/>
                 <a:cs typeface="Amiri" pitchFamily="2" charset="-78"/>
               </a:rPr>
               <a:t>لَوْ خَصَّصَتْ … لَعَاشَ</a:t>
@@ -10820,6 +10905,7 @@
                   <a:srgbClr val="D4AF37"/>
                 </a:solidFill>
                 <a:latin typeface="Amiri" pitchFamily="2" charset="-78"/>
+                <a:ea typeface="Amiri" pitchFamily="2" charset="-78"/>
                 <a:cs typeface="Amiri" pitchFamily="2" charset="-78"/>
               </a:rPr>
               <a:t>م</a:t>
@@ -11140,6 +11226,7 @@
                   <a:srgbClr val="8A6D1E"/>
                 </a:solidFill>
                 <a:latin typeface="Amiri" pitchFamily="2" charset="-78"/>
+                <a:ea typeface="Amiri" pitchFamily="2" charset="-78"/>
                 <a:cs typeface="Amiri" pitchFamily="2" charset="-78"/>
               </a:rPr>
               <a:t>قَيِّمْ عَمَلَكَ</a:t>
@@ -12384,6 +12471,7 @@
                   <a:srgbClr val="FFFFFF"/>
                 </a:solidFill>
                 <a:latin typeface="Amiri" pitchFamily="2" charset="-78"/>
+                <a:ea typeface="Amiri" pitchFamily="2" charset="-78"/>
                 <a:cs typeface="Amiri" pitchFamily="2" charset="-78"/>
               </a:rPr>
               <a:t>أَحْسَنْتُمْ! إِلَى اللِّقَاءِ</a:t>
@@ -12536,6 +12624,7 @@
                   <a:srgbClr val="D4AF37"/>
                 </a:solidFill>
                 <a:latin typeface="Amiri" pitchFamily="2" charset="-78"/>
+                <a:ea typeface="Amiri" pitchFamily="2" charset="-78"/>
                 <a:cs typeface="Amiri" pitchFamily="2" charset="-78"/>
               </a:rPr>
               <a:t>وَرْشَةُ التَّدْرِيبِ</a:t>
@@ -12669,6 +12758,7 @@
                   <a:srgbClr val="D4AF37"/>
                 </a:solidFill>
                 <a:latin typeface="Amiri" pitchFamily="2" charset="-78"/>
+                <a:ea typeface="Amiri" pitchFamily="2" charset="-78"/>
                 <a:cs typeface="Amiri" pitchFamily="2" charset="-78"/>
               </a:rPr>
               <a:t>م</a:t>
@@ -12989,6 +13079,7 @@
                   <a:srgbClr val="8A6D1E"/>
                 </a:solidFill>
                 <a:latin typeface="Amiri" pitchFamily="2" charset="-78"/>
+                <a:ea typeface="Amiri" pitchFamily="2" charset="-78"/>
                 <a:cs typeface="Amiri" pitchFamily="2" charset="-78"/>
               </a:rPr>
               <a:t>آدَابُ الصَّفِّ</a:t>
@@ -14520,6 +14611,7 @@
                   <a:srgbClr val="D4AF37"/>
                 </a:solidFill>
                 <a:latin typeface="Amiri" pitchFamily="2" charset="-78"/>
+                <a:ea typeface="Amiri" pitchFamily="2" charset="-78"/>
                 <a:cs typeface="Amiri" pitchFamily="2" charset="-78"/>
               </a:rPr>
               <a:t>م</a:t>
@@ -14840,6 +14932,7 @@
                   <a:srgbClr val="8A6D1E"/>
                 </a:solidFill>
                 <a:latin typeface="Amiri" pitchFamily="2" charset="-78"/>
+                <a:ea typeface="Amiri" pitchFamily="2" charset="-78"/>
                 <a:cs typeface="Amiri" pitchFamily="2" charset="-78"/>
               </a:rPr>
               <a:t>خَرِيطَةُ الوَرْشَةِ</a:t>
@@ -15154,6 +15247,7 @@
                   <a:srgbClr val="1B3B6F"/>
                 </a:solidFill>
                 <a:latin typeface="Amiri" pitchFamily="2" charset="-78"/>
+                <a:ea typeface="Amiri" pitchFamily="2" charset="-78"/>
                 <a:cs typeface="Amiri" pitchFamily="2" charset="-78"/>
               </a:rPr>
               <a:t>كَيْفَ</a:t>
@@ -15430,6 +15524,7 @@
                   <a:srgbClr val="1E6B52"/>
                 </a:solidFill>
                 <a:latin typeface="Amiri" pitchFamily="2" charset="-78"/>
+                <a:ea typeface="Amiri" pitchFamily="2" charset="-78"/>
                 <a:cs typeface="Amiri" pitchFamily="2" charset="-78"/>
               </a:rPr>
               <a:t>الاسْتِمَارَةُ</a:t>
@@ -15706,6 +15801,7 @@
                   <a:srgbClr val="1E6B52"/>
                 </a:solidFill>
                 <a:latin typeface="Amiri" pitchFamily="2" charset="-78"/>
+                <a:ea typeface="Amiri" pitchFamily="2" charset="-78"/>
                 <a:cs typeface="Amiri" pitchFamily="2" charset="-78"/>
               </a:rPr>
               <a:t>الرِّسَالَةُ</a:t>
@@ -15982,6 +16078,7 @@
                   <a:srgbClr val="1E6B52"/>
                 </a:solidFill>
                 <a:latin typeface="Amiri" pitchFamily="2" charset="-78"/>
+                <a:ea typeface="Amiri" pitchFamily="2" charset="-78"/>
                 <a:cs typeface="Amiri" pitchFamily="2" charset="-78"/>
               </a:rPr>
               <a:t>المَقَالُ</a:t>
@@ -16258,6 +16355,7 @@
                   <a:srgbClr val="8A6D1E"/>
                 </a:solidFill>
                 <a:latin typeface="Amiri" pitchFamily="2" charset="-78"/>
+                <a:ea typeface="Amiri" pitchFamily="2" charset="-78"/>
                 <a:cs typeface="Amiri" pitchFamily="2" charset="-78"/>
               </a:rPr>
               <a:t>قَيِّمْ</a:t>
@@ -16501,6 +16599,7 @@
                   <a:srgbClr val="D4AF37"/>
                 </a:solidFill>
                 <a:latin typeface="Amiri" pitchFamily="2" charset="-78"/>
+                <a:ea typeface="Amiri" pitchFamily="2" charset="-78"/>
                 <a:cs typeface="Amiri" pitchFamily="2" charset="-78"/>
               </a:rPr>
               <a:t>م</a:t>
@@ -16821,6 +16920,7 @@
                   <a:srgbClr val="8A6D1E"/>
                 </a:solidFill>
                 <a:latin typeface="Amiri" pitchFamily="2" charset="-78"/>
+                <a:ea typeface="Amiri" pitchFamily="2" charset="-78"/>
                 <a:cs typeface="Amiri" pitchFamily="2" charset="-78"/>
               </a:rPr>
               <a:t>امْتِحَانُ الكِتَابَةِ</a:t>
@@ -17445,6 +17545,7 @@
                   <a:srgbClr val="1B3B6F"/>
                 </a:solidFill>
                 <a:latin typeface="Amiri" pitchFamily="2" charset="-78"/>
+                <a:ea typeface="Amiri" pitchFamily="2" charset="-78"/>
                 <a:cs typeface="Amiri" pitchFamily="2" charset="-78"/>
               </a:rPr>
               <a:t>الجِبَالُ عَالِيَةٌ، وَالوِدْيَانُ خَضْرَاءُ</a:t>
@@ -17544,6 +17645,7 @@
                   <a:srgbClr val="1B3B6F"/>
                 </a:solidFill>
                 <a:latin typeface="Amiri" pitchFamily="2" charset="-78"/>
+                <a:ea typeface="Amiri" pitchFamily="2" charset="-78"/>
                 <a:cs typeface="Amiri" pitchFamily="2" charset="-78"/>
               </a:rPr>
               <a:t>رَأَيْنَا صَقْرًا يَطِيرُ فَوْقَنَا</a:t>
@@ -17643,6 +17745,7 @@
                   <a:srgbClr val="1B3B6F"/>
                 </a:solidFill>
                 <a:latin typeface="Amiri" pitchFamily="2" charset="-78"/>
+                <a:ea typeface="Amiri" pitchFamily="2" charset="-78"/>
                 <a:cs typeface="Amiri" pitchFamily="2" charset="-78"/>
               </a:rPr>
               <a:t>الحَيَوَانَاتُ الَّتِي تَعِيشُ هُنَاكَ</a:t>
@@ -17814,6 +17917,7 @@
                   <a:srgbClr val="D4AF37"/>
                 </a:solidFill>
                 <a:latin typeface="Amiri" pitchFamily="2" charset="-78"/>
+                <a:ea typeface="Amiri" pitchFamily="2" charset="-78"/>
                 <a:cs typeface="Amiri" pitchFamily="2" charset="-78"/>
               </a:rPr>
               <a:t>م</a:t>
@@ -18134,6 +18238,7 @@
                   <a:srgbClr val="8A6D1E"/>
                 </a:solidFill>
                 <a:latin typeface="Amiri" pitchFamily="2" charset="-78"/>
+                <a:ea typeface="Amiri" pitchFamily="2" charset="-78"/>
                 <a:cs typeface="Amiri" pitchFamily="2" charset="-78"/>
               </a:rPr>
               <a:t>اسْتِمَارَةُ التَّطَوُّعِ فِي المَحْمِيَّةِ</a:t>
@@ -18490,6 +18595,7 @@
                   <a:srgbClr val="1B3B6F"/>
                 </a:solidFill>
                 <a:latin typeface="Amiri" pitchFamily="2" charset="-78"/>
+                <a:ea typeface="Amiri" pitchFamily="2" charset="-78"/>
                 <a:cs typeface="Amiri" pitchFamily="2" charset="-78"/>
               </a:rPr>
               <a:t>الاسْمُ وَالعُمْرُ</a:t>
@@ -18734,6 +18840,7 @@
                   <a:srgbClr val="1B3B6F"/>
                 </a:solidFill>
                 <a:latin typeface="Amiri" pitchFamily="2" charset="-78"/>
+                <a:ea typeface="Amiri" pitchFamily="2" charset="-78"/>
                 <a:cs typeface="Amiri" pitchFamily="2" charset="-78"/>
               </a:rPr>
               <a:t>المَكَانُ الطَّبِيعِيُّ المُفَضَّلُ</a:t>
@@ -18978,6 +19085,7 @@
                   <a:srgbClr val="1B3B6F"/>
                 </a:solidFill>
                 <a:latin typeface="Amiri" pitchFamily="2" charset="-78"/>
+                <a:ea typeface="Amiri" pitchFamily="2" charset="-78"/>
                 <a:cs typeface="Amiri" pitchFamily="2" charset="-78"/>
               </a:rPr>
               <a:t>حَيَوَانٌ تُحِبُّهُ</a:t>
@@ -19222,6 +19330,7 @@
                   <a:srgbClr val="1B3B6F"/>
                 </a:solidFill>
                 <a:latin typeface="Amiri" pitchFamily="2" charset="-78"/>
+                <a:ea typeface="Amiri" pitchFamily="2" charset="-78"/>
                 <a:cs typeface="Amiri" pitchFamily="2" charset="-78"/>
               </a:rPr>
               <a:t>أَيْنَ يَعِيشُ؟</a:t>
@@ -19466,6 +19575,7 @@
                   <a:srgbClr val="1B3B6F"/>
                 </a:solidFill>
                 <a:latin typeface="Amiri" pitchFamily="2" charset="-78"/>
+                <a:ea typeface="Amiri" pitchFamily="2" charset="-78"/>
                 <a:cs typeface="Amiri" pitchFamily="2" charset="-78"/>
               </a:rPr>
               <a:t>الأَيَّامُ المُنَاسِبَةُ</a:t>
@@ -19710,6 +19820,7 @@
                   <a:srgbClr val="1B3B6F"/>
                 </a:solidFill>
                 <a:latin typeface="Amiri" pitchFamily="2" charset="-78"/>
+                <a:ea typeface="Amiri" pitchFamily="2" charset="-78"/>
                 <a:cs typeface="Amiri" pitchFamily="2" charset="-78"/>
               </a:rPr>
               <a:t>مَهَارَةٌ عِنْدَكَ</a:t>
@@ -19954,6 +20065,7 @@
                   <a:srgbClr val="1B3B6F"/>
                 </a:solidFill>
                 <a:latin typeface="Amiri" pitchFamily="2" charset="-78"/>
+                <a:ea typeface="Amiri" pitchFamily="2" charset="-78"/>
                 <a:cs typeface="Amiri" pitchFamily="2" charset="-78"/>
               </a:rPr>
               <a:t>نَشَاطٌ تُرِيدُ أَنْ تُشَارِكَ فِيهِ</a:t>
@@ -20133,6 +20245,7 @@
                   <a:srgbClr val="1B3B6F"/>
                 </a:solidFill>
                 <a:latin typeface="Amiri" pitchFamily="2" charset="-78"/>
+                <a:ea typeface="Amiri" pitchFamily="2" charset="-78"/>
                 <a:cs typeface="Amiri" pitchFamily="2" charset="-78"/>
               </a:rPr>
               <a:t>جُمْلَةٌ: لِمَاذَا تُرِيدُ أَنْ تَتَطَوَّعَ؟</a:t>
@@ -20342,6 +20455,7 @@
                   <a:srgbClr val="D4AF37"/>
                 </a:solidFill>
                 <a:latin typeface="Amiri" pitchFamily="2" charset="-78"/>
+                <a:ea typeface="Amiri" pitchFamily="2" charset="-78"/>
                 <a:cs typeface="Amiri" pitchFamily="2" charset="-78"/>
               </a:rPr>
               <a:t>م</a:t>
@@ -20662,6 +20776,7 @@
                   <a:srgbClr val="8A6D1E"/>
                 </a:solidFill>
                 <a:latin typeface="Amiri" pitchFamily="2" charset="-78"/>
+                <a:ea typeface="Amiri" pitchFamily="2" charset="-78"/>
                 <a:cs typeface="Amiri" pitchFamily="2" charset="-78"/>
               </a:rPr>
               <a:t>نَمُوذَجُ الإِجَابَةِ</a:t>
@@ -20980,6 +21095,7 @@
                   <a:srgbClr val="1B3B6F"/>
                 </a:solidFill>
                 <a:latin typeface="Amiri" pitchFamily="2" charset="-78"/>
+                <a:ea typeface="Amiri" pitchFamily="2" charset="-78"/>
                 <a:cs typeface="Amiri" pitchFamily="2" charset="-78"/>
               </a:rPr>
               <a:t>سَارَةُ عَلِيٌّ، سِتَّ عَشْرَةَ سَنَةً</a:t>
@@ -21018,6 +21134,7 @@
                   <a:srgbClr val="1B3B6F"/>
                 </a:solidFill>
                 <a:latin typeface="Amiri" pitchFamily="2" charset="-78"/>
+                <a:ea typeface="Amiri" pitchFamily="2" charset="-78"/>
                 <a:cs typeface="Amiri" pitchFamily="2" charset="-78"/>
               </a:rPr>
               <a:t>الاسْمُ وَالعُمْرُ</a:t>
@@ -21159,6 +21276,7 @@
                   <a:srgbClr val="1B3B6F"/>
                 </a:solidFill>
                 <a:latin typeface="Amiri" pitchFamily="2" charset="-78"/>
+                <a:ea typeface="Amiri" pitchFamily="2" charset="-78"/>
                 <a:cs typeface="Amiri" pitchFamily="2" charset="-78"/>
               </a:rPr>
               <a:t>الجِبَالُ</a:t>
@@ -21197,6 +21315,7 @@
                   <a:srgbClr val="1B3B6F"/>
                 </a:solidFill>
                 <a:latin typeface="Amiri" pitchFamily="2" charset="-78"/>
+                <a:ea typeface="Amiri" pitchFamily="2" charset="-78"/>
                 <a:cs typeface="Amiri" pitchFamily="2" charset="-78"/>
               </a:rPr>
               <a:t>المَكَانُ الطَّبِيعِيُّ المُفَضَّلُ</a:t>
@@ -21338,6 +21457,7 @@
                   <a:srgbClr val="1B3B6F"/>
                 </a:solidFill>
                 <a:latin typeface="Amiri" pitchFamily="2" charset="-78"/>
+                <a:ea typeface="Amiri" pitchFamily="2" charset="-78"/>
                 <a:cs typeface="Amiri" pitchFamily="2" charset="-78"/>
               </a:rPr>
               <a:t>الصَّقْرُ</a:t>
@@ -21376,6 +21496,7 @@
                   <a:srgbClr val="1B3B6F"/>
                 </a:solidFill>
                 <a:latin typeface="Amiri" pitchFamily="2" charset="-78"/>
+                <a:ea typeface="Amiri" pitchFamily="2" charset="-78"/>
                 <a:cs typeface="Amiri" pitchFamily="2" charset="-78"/>
               </a:rPr>
               <a:t>حَيَوَانٌ تُحِبُّهُ</a:t>
@@ -21517,6 +21638,7 @@
                   <a:srgbClr val="1B3B6F"/>
                 </a:solidFill>
                 <a:latin typeface="Amiri" pitchFamily="2" charset="-78"/>
+                <a:ea typeface="Amiri" pitchFamily="2" charset="-78"/>
                 <a:cs typeface="Amiri" pitchFamily="2" charset="-78"/>
               </a:rPr>
               <a:t>فِي الصَّحْرَاءِ وَالجِبَالِ</a:t>
@@ -21555,6 +21677,7 @@
                   <a:srgbClr val="1B3B6F"/>
                 </a:solidFill>
                 <a:latin typeface="Amiri" pitchFamily="2" charset="-78"/>
+                <a:ea typeface="Amiri" pitchFamily="2" charset="-78"/>
                 <a:cs typeface="Amiri" pitchFamily="2" charset="-78"/>
               </a:rPr>
               <a:t>أَيْنَ يَعِيشُ؟</a:t>
@@ -21696,6 +21819,7 @@
                   <a:srgbClr val="1B3B6F"/>
                 </a:solidFill>
                 <a:latin typeface="Amiri" pitchFamily="2" charset="-78"/>
+                <a:ea typeface="Amiri" pitchFamily="2" charset="-78"/>
                 <a:cs typeface="Amiri" pitchFamily="2" charset="-78"/>
               </a:rPr>
               <a:t>السَّبْتُ وَالأَحَدُ</a:t>
@@ -21734,6 +21858,7 @@
                   <a:srgbClr val="1B3B6F"/>
                 </a:solidFill>
                 <a:latin typeface="Amiri" pitchFamily="2" charset="-78"/>
+                <a:ea typeface="Amiri" pitchFamily="2" charset="-78"/>
                 <a:cs typeface="Amiri" pitchFamily="2" charset="-78"/>
               </a:rPr>
               <a:t>الأَيَّامُ المُنَاسِبَةُ</a:t>
@@ -21875,6 +22000,7 @@
                   <a:srgbClr val="1B3B6F"/>
                 </a:solidFill>
                 <a:latin typeface="Amiri" pitchFamily="2" charset="-78"/>
+                <a:ea typeface="Amiri" pitchFamily="2" charset="-78"/>
                 <a:cs typeface="Amiri" pitchFamily="2" charset="-78"/>
               </a:rPr>
               <a:t>التَّصْوِيرُ</a:t>
@@ -21913,6 +22039,7 @@
                   <a:srgbClr val="1B3B6F"/>
                 </a:solidFill>
                 <a:latin typeface="Amiri" pitchFamily="2" charset="-78"/>
+                <a:ea typeface="Amiri" pitchFamily="2" charset="-78"/>
                 <a:cs typeface="Amiri" pitchFamily="2" charset="-78"/>
               </a:rPr>
               <a:t>مَهَارَةٌ عِنْدَكَ</a:t>
@@ -22054,6 +22181,7 @@
                   <a:srgbClr val="1B3B6F"/>
                 </a:solidFill>
                 <a:latin typeface="Amiri" pitchFamily="2" charset="-78"/>
+                <a:ea typeface="Amiri" pitchFamily="2" charset="-78"/>
                 <a:cs typeface="Amiri" pitchFamily="2" charset="-78"/>
               </a:rPr>
               <a:t>زِرَاعَةُ الأَشْجَارِ قُرْبَ النَّهْرِ</a:t>
@@ -22092,6 +22220,7 @@
                   <a:srgbClr val="1B3B6F"/>
                 </a:solidFill>
                 <a:latin typeface="Amiri" pitchFamily="2" charset="-78"/>
+                <a:ea typeface="Amiri" pitchFamily="2" charset="-78"/>
                 <a:cs typeface="Amiri" pitchFamily="2" charset="-78"/>
               </a:rPr>
               <a:t>نَشَاطٌ تُرِيدُ أَنْ تُشَارِكَ فِيهِ</a:t>
@@ -22233,6 +22362,7 @@
                   <a:srgbClr val="1B3B6F"/>
                 </a:solidFill>
                 <a:latin typeface="Amiri" pitchFamily="2" charset="-78"/>
+                <a:ea typeface="Amiri" pitchFamily="2" charset="-78"/>
                 <a:cs typeface="Amiri" pitchFamily="2" charset="-78"/>
               </a:rPr>
               <a:t>أُرِيدُ أَنْ أَتَطَوَّعَ لِأَنَّ الطُّيُورَ الَّتِي تَعِيشُ هُنَا مُهَدَّدَةٌ.</a:t>
@@ -22271,6 +22401,7 @@
                   <a:srgbClr val="1B3B6F"/>
                 </a:solidFill>
                 <a:latin typeface="Amiri" pitchFamily="2" charset="-78"/>
+                <a:ea typeface="Amiri" pitchFamily="2" charset="-78"/>
                 <a:cs typeface="Amiri" pitchFamily="2" charset="-78"/>
               </a:rPr>
               <a:t>جُمْلَةٌ: لِمَاذَا تُرِيدُ أَنْ تَتَطَوَّعَ؟</a:t>
@@ -22480,6 +22611,7 @@
                   <a:srgbClr val="D4AF37"/>
                 </a:solidFill>
                 <a:latin typeface="Amiri" pitchFamily="2" charset="-78"/>
+                <a:ea typeface="Amiri" pitchFamily="2" charset="-78"/>
                 <a:cs typeface="Amiri" pitchFamily="2" charset="-78"/>
               </a:rPr>
               <a:t>م</a:t>
@@ -22800,6 +22932,7 @@
                   <a:srgbClr val="8A6D1E"/>
                 </a:solidFill>
                 <a:latin typeface="Amiri" pitchFamily="2" charset="-78"/>
+                <a:ea typeface="Amiri" pitchFamily="2" charset="-78"/>
                 <a:cs typeface="Amiri" pitchFamily="2" charset="-78"/>
               </a:rPr>
               <a:t>رِسَالَةٌ مِنَ الجِبَالِ</a:t>
@@ -23275,6 +23408,7 @@
                   <a:srgbClr val="1B3B6F"/>
                 </a:solidFill>
                 <a:latin typeface="Amiri" pitchFamily="2" charset="-78"/>
+                <a:ea typeface="Amiri" pitchFamily="2" charset="-78"/>
                 <a:cs typeface="Amiri" pitchFamily="2" charset="-78"/>
               </a:rPr>
               <a:t>المَنْظَرُ هُنَا … : الجِبَالُ … وَالبُحَيْرَاتُ …</a:t>
@@ -23351,6 +23485,7 @@
                   <a:srgbClr val="1B3B6F"/>
                 </a:solidFill>
                 <a:latin typeface="Amiri" pitchFamily="2" charset="-78"/>
+                <a:ea typeface="Amiri" pitchFamily="2" charset="-78"/>
                 <a:cs typeface="Amiri" pitchFamily="2" charset="-78"/>
               </a:rPr>
               <a:t>أَمْسِ مَشَيْنَا … وَرَأَيْنَا …</a:t>
@@ -23427,6 +23562,7 @@
                   <a:srgbClr val="1B3B6F"/>
                 </a:solidFill>
                 <a:latin typeface="Amiri" pitchFamily="2" charset="-78"/>
+                <a:ea typeface="Amiri" pitchFamily="2" charset="-78"/>
                 <a:cs typeface="Amiri" pitchFamily="2" charset="-78"/>
               </a:rPr>
               <a:t>أُحِبُّ … لِأَنَّهَا …</a:t>
@@ -23503,6 +23639,7 @@
                   <a:srgbClr val="1B3B6F"/>
                 </a:solidFill>
                 <a:latin typeface="Amiri" pitchFamily="2" charset="-78"/>
+                <a:ea typeface="Amiri" pitchFamily="2" charset="-78"/>
                 <a:cs typeface="Amiri" pitchFamily="2" charset="-78"/>
               </a:rPr>
               <a:t>غَدًا سَنَزُورُ …</a:t>
@@ -23674,6 +23811,7 @@
                   <a:srgbClr val="D4AF37"/>
                 </a:solidFill>
                 <a:latin typeface="Amiri" pitchFamily="2" charset="-78"/>
+                <a:ea typeface="Amiri" pitchFamily="2" charset="-78"/>
                 <a:cs typeface="Amiri" pitchFamily="2" charset="-78"/>
               </a:rPr>
               <a:t>م</a:t>
@@ -23994,6 +24132,7 @@
                   <a:srgbClr val="8A6D1E"/>
                 </a:solidFill>
                 <a:latin typeface="Amiri" pitchFamily="2" charset="-78"/>
+                <a:ea typeface="Amiri" pitchFamily="2" charset="-78"/>
                 <a:cs typeface="Amiri" pitchFamily="2" charset="-78"/>
               </a:rPr>
               <a:t>نَصُّ السُّؤَالِ</a:t>
@@ -24274,6 +24413,7 @@
                   <a:srgbClr val="1B3B6F"/>
                 </a:solidFill>
                 <a:latin typeface="Amiri" pitchFamily="2" charset="-78"/>
+                <a:ea typeface="Amiri" pitchFamily="2" charset="-78"/>
                 <a:cs typeface="Amiri" pitchFamily="2" charset="-78"/>
               </a:rPr>
               <a:t>أَنْتِ فِي رِحْلَةٍ مَدْرَسِيَّةٍ فِي الرِّيفِ. اكْتُبِي رِسَالَةً إِلَى صَدِيقَتِكِ (٨٠–٩٠ كَلِمَةً).</a:t>
@@ -24415,6 +24555,7 @@
                   <a:srgbClr val="1B3B6F"/>
                 </a:solidFill>
                 <a:latin typeface="Amiri" pitchFamily="2" charset="-78"/>
+                <a:ea typeface="Amiri" pitchFamily="2" charset="-78"/>
                 <a:cs typeface="Amiri" pitchFamily="2" charset="-78"/>
               </a:rPr>
               <a:t>أَيْنَ أَنْتِ؟ وَكَيْفَ المَنْظَرُ؟</a:t>
@@ -24556,6 +24697,7 @@
                   <a:srgbClr val="1B3B6F"/>
                 </a:solidFill>
                 <a:latin typeface="Amiri" pitchFamily="2" charset="-78"/>
+                <a:ea typeface="Amiri" pitchFamily="2" charset="-78"/>
                 <a:cs typeface="Amiri" pitchFamily="2" charset="-78"/>
               </a:rPr>
               <a:t>مَاذَا فَعَلْتِ أَمْسِ؟ وَمَاذَا رَأَيْتِ؟</a:t>
@@ -24697,6 +24839,7 @@
                   <a:srgbClr val="1B3B6F"/>
                 </a:solidFill>
                 <a:latin typeface="Amiri" pitchFamily="2" charset="-78"/>
+                <a:ea typeface="Amiri" pitchFamily="2" charset="-78"/>
                 <a:cs typeface="Amiri" pitchFamily="2" charset="-78"/>
               </a:rPr>
               <a:t>مَا رَأْيُكِ فِي المَكَانِ؟ وَلِمَاذَا؟</a:t>
@@ -24838,6 +24981,7 @@
                   <a:srgbClr val="1B3B6F"/>
                 </a:solidFill>
                 <a:latin typeface="Amiri" pitchFamily="2" charset="-78"/>
+                <a:ea typeface="Amiri" pitchFamily="2" charset="-78"/>
                 <a:cs typeface="Amiri" pitchFamily="2" charset="-78"/>
               </a:rPr>
               <a:t>مَاذَا سَتَفْعَلِينَ غَدًا؟</a:t>
@@ -25047,6 +25191,7 @@
                   <a:srgbClr val="D4AF37"/>
                 </a:solidFill>
                 <a:latin typeface="Amiri" pitchFamily="2" charset="-78"/>
+                <a:ea typeface="Amiri" pitchFamily="2" charset="-78"/>
                 <a:cs typeface="Amiri" pitchFamily="2" charset="-78"/>
               </a:rPr>
               <a:t>م</a:t>
@@ -25367,6 +25512,7 @@
                   <a:srgbClr val="8A6D1E"/>
                 </a:solidFill>
                 <a:latin typeface="Amiri" pitchFamily="2" charset="-78"/>
+                <a:ea typeface="Amiri" pitchFamily="2" charset="-78"/>
                 <a:cs typeface="Amiri" pitchFamily="2" charset="-78"/>
               </a:rPr>
               <a:t>قَوَالِبُ الكِتَابَةِ</a:t>
@@ -25647,6 +25793,7 @@
                   <a:srgbClr val="1B3B6F"/>
                 </a:solidFill>
                 <a:latin typeface="Amiri" pitchFamily="2" charset="-78"/>
+                <a:ea typeface="Amiri" pitchFamily="2" charset="-78"/>
                 <a:cs typeface="Amiri" pitchFamily="2" charset="-78"/>
               </a:rPr>
               <a:t>مَرْحَبًا يَا ______ ، كَيْفَ حَالُكِ؟</a:t>
@@ -25853,6 +26000,7 @@
                   <a:srgbClr val="1B3B6F"/>
                 </a:solidFill>
                 <a:latin typeface="Amiri" pitchFamily="2" charset="-78"/>
+                <a:ea typeface="Amiri" pitchFamily="2" charset="-78"/>
                 <a:cs typeface="Amiri" pitchFamily="2" charset="-78"/>
               </a:rPr>
               <a:t>أَنَا الآنَ فِي ______ . الجِبَالُ ______ ، وَالبُحَيْرَاتُ ______ .</a:t>
@@ -26059,6 +26207,7 @@
                   <a:srgbClr val="1B3B6F"/>
                 </a:solidFill>
                 <a:latin typeface="Amiri" pitchFamily="2" charset="-78"/>
+                <a:ea typeface="Amiri" pitchFamily="2" charset="-78"/>
                 <a:cs typeface="Amiri" pitchFamily="2" charset="-78"/>
               </a:rPr>
               <a:t>أَمْسِ مَشَيْنَا ______ ، وَرَأَيْنَا ______ .</a:t>
@@ -26265,6 +26414,7 @@
                   <a:srgbClr val="1B3B6F"/>
                 </a:solidFill>
                 <a:latin typeface="Amiri" pitchFamily="2" charset="-78"/>
+                <a:ea typeface="Amiri" pitchFamily="2" charset="-78"/>
                 <a:cs typeface="Amiri" pitchFamily="2" charset="-78"/>
               </a:rPr>
               <a:t>أُحِبُّ هٰذَا المَكَانَ، لِأَنَّهُ ______ .</a:t>
@@ -26471,6 +26621,7 @@
                   <a:srgbClr val="1B3B6F"/>
                 </a:solidFill>
                 <a:latin typeface="Amiri" pitchFamily="2" charset="-78"/>
+                <a:ea typeface="Amiri" pitchFamily="2" charset="-78"/>
                 <a:cs typeface="Amiri" pitchFamily="2" charset="-78"/>
               </a:rPr>
               <a:t>غَدًا سَنَزُورُ ______ .</a:t>
@@ -26677,6 +26828,7 @@
                   <a:srgbClr val="1B3B6F"/>
                 </a:solidFill>
                 <a:latin typeface="Amiri" pitchFamily="2" charset="-78"/>
+                <a:ea typeface="Amiri" pitchFamily="2" charset="-78"/>
                 <a:cs typeface="Amiri" pitchFamily="2" charset="-78"/>
               </a:rPr>
               <a:t>مَعَ السَّلَامَةِ، ______</a:t>
@@ -26916,13 +27068,9 @@
     <a:fontScheme name="Office">
       <a:majorFont>
         <a:latin typeface="Calibri Light" panose="020F0302020204030204"/>
-        <a:ea typeface=""/>
-        <a:cs typeface=""/>
-        <a:font script="Jpan" typeface="游ゴシック Light"/>
-        <a:font script="Hang" typeface="맑은 고딕"/>
-        <a:font script="Hans" typeface="等线 Light"/>
-        <a:font script="Hant" typeface="新細明體"/>
-        <a:font script="Arab" typeface="Times New Roman"/>
+        <a:ea typeface="Amiri" pitchFamily="2" charset="-78"/>
+        <a:cs typeface="Amiri" pitchFamily="2" charset="-78"/>
+        <a:font script="Arab" typeface="Amiri"/>
         <a:font script="Hebr" typeface="Times New Roman"/>
         <a:font script="Thai" typeface="Angsana New"/>
         <a:font script="Ethi" typeface="Nyala"/>
@@ -26968,13 +27116,9 @@
       </a:majorFont>
       <a:minorFont>
         <a:latin typeface="Calibri" panose="020F0502020204030204"/>
-        <a:ea typeface=""/>
-        <a:cs typeface=""/>
-        <a:font script="Jpan" typeface="游ゴシック"/>
-        <a:font script="Hang" typeface="맑은 고딕"/>
-        <a:font script="Hans" typeface="等线"/>
-        <a:font script="Hant" typeface="新細明體"/>
-        <a:font script="Arab" typeface="Arial"/>
+        <a:ea typeface="Amiri" pitchFamily="2" charset="-78"/>
+        <a:cs typeface="Amiri" pitchFamily="2" charset="-78"/>
+        <a:font script="Arab" typeface="Amiri"/>
         <a:font script="Hebr" typeface="Arial"/>
         <a:font script="Thai" typeface="Cordia New"/>
         <a:font script="Ethi" typeface="Nyala"/>

--- a/Topic_C/Exam_Practice/TC-L02_Writing_Workshop_Landscapes_Nature_Animals.pptx
+++ b/Topic_C/Exam_Practice/TC-L02_Writing_Workshop_Landscapes_Nature_Animals.pptx
@@ -3848,7 +3848,7 @@
                 <a:solidFill>
                   <a:srgbClr val="FFFFFF"/>
                 </a:solidFill>
-                <a:latin typeface="Calibri" pitchFamily="34" charset="0"/>
+                <a:latin typeface="Amiri" pitchFamily="2" charset="-78"/>
                 <a:ea typeface="Amiri" pitchFamily="2" charset="-78"/>
                 <a:cs typeface="Amiri" pitchFamily="2" charset="-78"/>
               </a:rPr>
@@ -3914,7 +3914,7 @@
                 <a:solidFill>
                   <a:srgbClr val="FFFFFF"/>
                 </a:solidFill>
-                <a:latin typeface="Calibri" pitchFamily="34" charset="0"/>
+                <a:latin typeface="Amiri" pitchFamily="2" charset="-78"/>
                 <a:ea typeface="Amiri" pitchFamily="2" charset="-78"/>
                 <a:cs typeface="Amiri" pitchFamily="2" charset="-78"/>
               </a:rPr>
@@ -3980,7 +3980,7 @@
                 <a:solidFill>
                   <a:srgbClr val="FFFFFF"/>
                 </a:solidFill>
-                <a:latin typeface="Calibri" pitchFamily="34" charset="0"/>
+                <a:latin typeface="Amiri" pitchFamily="2" charset="-78"/>
                 <a:ea typeface="Amiri" pitchFamily="2" charset="-78"/>
                 <a:cs typeface="Amiri" pitchFamily="2" charset="-78"/>
               </a:rPr>
@@ -4046,7 +4046,7 @@
                 <a:solidFill>
                   <a:srgbClr val="FFFFFF"/>
                 </a:solidFill>
-                <a:latin typeface="Calibri" pitchFamily="34" charset="0"/>
+                <a:latin typeface="Amiri" pitchFamily="2" charset="-78"/>
                 <a:ea typeface="Amiri" pitchFamily="2" charset="-78"/>
                 <a:cs typeface="Amiri" pitchFamily="2" charset="-78"/>
               </a:rPr>
@@ -4844,7 +4844,7 @@
                 <a:solidFill>
                   <a:srgbClr val="FFFFFF"/>
                 </a:solidFill>
-                <a:latin typeface="Calibri" pitchFamily="34" charset="0"/>
+                <a:latin typeface="Amiri" pitchFamily="2" charset="-78"/>
                 <a:ea typeface="Amiri" pitchFamily="2" charset="-78"/>
                 <a:cs typeface="Amiri" pitchFamily="2" charset="-78"/>
               </a:rPr>
@@ -4910,7 +4910,7 @@
                 <a:solidFill>
                   <a:srgbClr val="FFFFFF"/>
                 </a:solidFill>
-                <a:latin typeface="Calibri" pitchFamily="34" charset="0"/>
+                <a:latin typeface="Amiri" pitchFamily="2" charset="-78"/>
                 <a:ea typeface="Amiri" pitchFamily="2" charset="-78"/>
                 <a:cs typeface="Amiri" pitchFamily="2" charset="-78"/>
               </a:rPr>
@@ -4976,7 +4976,7 @@
                 <a:solidFill>
                   <a:srgbClr val="FFFFFF"/>
                 </a:solidFill>
-                <a:latin typeface="Calibri" pitchFamily="34" charset="0"/>
+                <a:latin typeface="Amiri" pitchFamily="2" charset="-78"/>
                 <a:ea typeface="Amiri" pitchFamily="2" charset="-78"/>
                 <a:cs typeface="Amiri" pitchFamily="2" charset="-78"/>
               </a:rPr>
@@ -5042,7 +5042,7 @@
                 <a:solidFill>
                   <a:srgbClr val="FFFFFF"/>
                 </a:solidFill>
-                <a:latin typeface="Calibri" pitchFamily="34" charset="0"/>
+                <a:latin typeface="Amiri" pitchFamily="2" charset="-78"/>
                 <a:ea typeface="Amiri" pitchFamily="2" charset="-78"/>
                 <a:cs typeface="Amiri" pitchFamily="2" charset="-78"/>
               </a:rPr>
@@ -8602,7 +8602,7 @@
                 <a:solidFill>
                   <a:srgbClr val="FFFFFF"/>
                 </a:solidFill>
-                <a:latin typeface="Calibri" pitchFamily="34" charset="0"/>
+                <a:latin typeface="Amiri" pitchFamily="2" charset="-78"/>
                 <a:ea typeface="Amiri" pitchFamily="2" charset="-78"/>
                 <a:cs typeface="Amiri" pitchFamily="2" charset="-78"/>
               </a:rPr>
@@ -8668,7 +8668,7 @@
                 <a:solidFill>
                   <a:srgbClr val="FFFFFF"/>
                 </a:solidFill>
-                <a:latin typeface="Calibri" pitchFamily="34" charset="0"/>
+                <a:latin typeface="Amiri" pitchFamily="2" charset="-78"/>
                 <a:ea typeface="Amiri" pitchFamily="2" charset="-78"/>
                 <a:cs typeface="Amiri" pitchFamily="2" charset="-78"/>
               </a:rPr>
@@ -8734,7 +8734,7 @@
                 <a:solidFill>
                   <a:srgbClr val="FFFFFF"/>
                 </a:solidFill>
-                <a:latin typeface="Calibri" pitchFamily="34" charset="0"/>
+                <a:latin typeface="Amiri" pitchFamily="2" charset="-78"/>
                 <a:ea typeface="Amiri" pitchFamily="2" charset="-78"/>
                 <a:cs typeface="Amiri" pitchFamily="2" charset="-78"/>
               </a:rPr>
@@ -8800,7 +8800,7 @@
                 <a:solidFill>
                   <a:srgbClr val="FFFFFF"/>
                 </a:solidFill>
-                <a:latin typeface="Calibri" pitchFamily="34" charset="0"/>
+                <a:latin typeface="Amiri" pitchFamily="2" charset="-78"/>
                 <a:ea typeface="Amiri" pitchFamily="2" charset="-78"/>
                 <a:cs typeface="Amiri" pitchFamily="2" charset="-78"/>
               </a:rPr>
@@ -9587,7 +9587,7 @@
                 <a:solidFill>
                   <a:srgbClr val="FFFFFF"/>
                 </a:solidFill>
-                <a:latin typeface="Calibri" pitchFamily="34" charset="0"/>
+                <a:latin typeface="Amiri" pitchFamily="2" charset="-78"/>
                 <a:ea typeface="Amiri" pitchFamily="2" charset="-78"/>
                 <a:cs typeface="Amiri" pitchFamily="2" charset="-78"/>
               </a:rPr>
@@ -9653,7 +9653,7 @@
                 <a:solidFill>
                   <a:srgbClr val="FFFFFF"/>
                 </a:solidFill>
-                <a:latin typeface="Calibri" pitchFamily="34" charset="0"/>
+                <a:latin typeface="Amiri" pitchFamily="2" charset="-78"/>
                 <a:ea typeface="Amiri" pitchFamily="2" charset="-78"/>
                 <a:cs typeface="Amiri" pitchFamily="2" charset="-78"/>
               </a:rPr>
@@ -9719,7 +9719,7 @@
                 <a:solidFill>
                   <a:srgbClr val="FFFFFF"/>
                 </a:solidFill>
-                <a:latin typeface="Calibri" pitchFamily="34" charset="0"/>
+                <a:latin typeface="Amiri" pitchFamily="2" charset="-78"/>
                 <a:ea typeface="Amiri" pitchFamily="2" charset="-78"/>
                 <a:cs typeface="Amiri" pitchFamily="2" charset="-78"/>
               </a:rPr>
@@ -9785,7 +9785,7 @@
                 <a:solidFill>
                   <a:srgbClr val="FFFFFF"/>
                 </a:solidFill>
-                <a:latin typeface="Calibri" pitchFamily="34" charset="0"/>
+                <a:latin typeface="Amiri" pitchFamily="2" charset="-78"/>
                 <a:ea typeface="Amiri" pitchFamily="2" charset="-78"/>
                 <a:cs typeface="Amiri" pitchFamily="2" charset="-78"/>
               </a:rPr>
@@ -10572,7 +10572,7 @@
                 <a:solidFill>
                   <a:srgbClr val="FFFFFF"/>
                 </a:solidFill>
-                <a:latin typeface="Calibri" pitchFamily="34" charset="0"/>
+                <a:latin typeface="Amiri" pitchFamily="2" charset="-78"/>
                 <a:ea typeface="Amiri" pitchFamily="2" charset="-78"/>
                 <a:cs typeface="Amiri" pitchFamily="2" charset="-78"/>
               </a:rPr>
@@ -10638,7 +10638,7 @@
                 <a:solidFill>
                   <a:srgbClr val="FFFFFF"/>
                 </a:solidFill>
-                <a:latin typeface="Calibri" pitchFamily="34" charset="0"/>
+                <a:latin typeface="Amiri" pitchFamily="2" charset="-78"/>
                 <a:ea typeface="Amiri" pitchFamily="2" charset="-78"/>
                 <a:cs typeface="Amiri" pitchFamily="2" charset="-78"/>
               </a:rPr>
@@ -10704,7 +10704,7 @@
                 <a:solidFill>
                   <a:srgbClr val="FFFFFF"/>
                 </a:solidFill>
-                <a:latin typeface="Calibri" pitchFamily="34" charset="0"/>
+                <a:latin typeface="Amiri" pitchFamily="2" charset="-78"/>
                 <a:ea typeface="Amiri" pitchFamily="2" charset="-78"/>
                 <a:cs typeface="Amiri" pitchFamily="2" charset="-78"/>
               </a:rPr>
@@ -10770,7 +10770,7 @@
                 <a:solidFill>
                   <a:srgbClr val="FFFFFF"/>
                 </a:solidFill>
-                <a:latin typeface="Calibri" pitchFamily="34" charset="0"/>
+                <a:latin typeface="Amiri" pitchFamily="2" charset="-78"/>
                 <a:ea typeface="Amiri" pitchFamily="2" charset="-78"/>
                 <a:cs typeface="Amiri" pitchFamily="2" charset="-78"/>
               </a:rPr>
